--- a/04-data-analysis/data_analysis_presentation.pptx
+++ b/04-data-analysis/data_analysis_presentation.pptx
@@ -50,7 +50,7 @@
     <p:sldId id="298" r:id="rId44"/>
     <p:sldId id="299" r:id="rId45"/>
   </p:sldIdLst>
-  <p:sldSz cx="9144000" cy="5143500" type="screen16x9"/>
+  <p:sldSz cx="12192000" cy="6858000" type="screen16x9"/>
   <p:notesSz cx="6858000" cy="9144000"/>
   <p:defaultTextStyle>
     <a:defPPr>
@@ -195,8 +195,8 @@
         </p:nvSpPr>
         <p:spPr>
           <a:xfrm>
-            <a:off x="685800" y="1597819"/>
-            <a:ext cx="7772400" cy="1102519"/>
+            <a:off x="914400" y="1597819"/>
+            <a:ext cx="10363200" cy="1102519"/>
           </a:xfrm>
         </p:spPr>
         <p:txBody>
@@ -222,8 +222,8 @@
         </p:nvSpPr>
         <p:spPr>
           <a:xfrm>
-            <a:off x="1371600" y="2914650"/>
-            <a:ext cx="6400800" cy="1314450"/>
+            <a:off x="1828800" y="2914650"/>
+            <a:ext cx="8534400" cy="1314450"/>
           </a:xfrm>
         </p:spPr>
         <p:txBody>
@@ -603,8 +603,8 @@
         </p:nvSpPr>
         <p:spPr>
           <a:xfrm>
-            <a:off x="6629400" y="205979"/>
-            <a:ext cx="2057400" cy="4388644"/>
+            <a:off x="8839200" y="550000"/>
+            <a:ext cx="2743200" cy="4388644"/>
           </a:xfrm>
         </p:spPr>
         <p:txBody>
@@ -630,8 +630,8 @@
         </p:nvSpPr>
         <p:spPr>
           <a:xfrm>
-            <a:off x="457200" y="205979"/>
-            <a:ext cx="6019800" cy="4388644"/>
+            <a:off x="609600" y="550000"/>
+            <a:ext cx="8026400" cy="4388644"/>
           </a:xfrm>
         </p:spPr>
         <p:txBody>
@@ -949,8 +949,8 @@
         </p:nvSpPr>
         <p:spPr>
           <a:xfrm>
-            <a:off x="722313" y="3305176"/>
-            <a:ext cx="7772400" cy="1021556"/>
+            <a:off x="963084" y="3305176"/>
+            <a:ext cx="10363200" cy="1021556"/>
           </a:xfrm>
         </p:spPr>
         <p:txBody>
@@ -980,8 +980,8 @@
         </p:nvSpPr>
         <p:spPr>
           <a:xfrm>
-            <a:off x="722313" y="2180035"/>
-            <a:ext cx="7772400" cy="1125140"/>
+            <a:off x="963084" y="2180035"/>
+            <a:ext cx="10363200" cy="1125140"/>
           </a:xfrm>
         </p:spPr>
         <p:txBody>
@@ -1216,8 +1216,8 @@
         </p:nvSpPr>
         <p:spPr>
           <a:xfrm>
-            <a:off x="457200" y="1200151"/>
-            <a:ext cx="4038600" cy="3394472"/>
+            <a:off x="609600" y="1200151"/>
+            <a:ext cx="5384800" cy="3394472"/>
           </a:xfrm>
         </p:spPr>
         <p:txBody>
@@ -1300,8 +1300,8 @@
         </p:nvSpPr>
         <p:spPr>
           <a:xfrm>
-            <a:off x="4648200" y="1200151"/>
-            <a:ext cx="4038600" cy="3394472"/>
+            <a:off x="6197600" y="1200151"/>
+            <a:ext cx="5384800" cy="3394472"/>
           </a:xfrm>
         </p:spPr>
         <p:txBody>
@@ -1505,8 +1505,8 @@
         </p:nvSpPr>
         <p:spPr>
           <a:xfrm>
-            <a:off x="457200" y="1151335"/>
-            <a:ext cx="4040188" cy="479822"/>
+            <a:off x="609600" y="1151335"/>
+            <a:ext cx="5386917" cy="479822"/>
           </a:xfrm>
         </p:spPr>
         <p:txBody>
@@ -1570,8 +1570,8 @@
         </p:nvSpPr>
         <p:spPr>
           <a:xfrm>
-            <a:off x="457200" y="1631156"/>
-            <a:ext cx="4040188" cy="2963466"/>
+            <a:off x="609600" y="1631156"/>
+            <a:ext cx="5386917" cy="2963466"/>
           </a:xfrm>
         </p:spPr>
         <p:txBody>
@@ -1654,8 +1654,8 @@
         </p:nvSpPr>
         <p:spPr>
           <a:xfrm>
-            <a:off x="4645026" y="1151335"/>
-            <a:ext cx="4041775" cy="479822"/>
+            <a:off x="6193368" y="1151335"/>
+            <a:ext cx="5389033" cy="479822"/>
           </a:xfrm>
         </p:spPr>
         <p:txBody>
@@ -1719,8 +1719,8 @@
         </p:nvSpPr>
         <p:spPr>
           <a:xfrm>
-            <a:off x="4645026" y="1631156"/>
-            <a:ext cx="4041775" cy="2963466"/>
+            <a:off x="6193368" y="1631156"/>
+            <a:ext cx="5389033" cy="2963466"/>
           </a:xfrm>
         </p:spPr>
         <p:txBody>
@@ -2110,8 +2110,8 @@
         </p:nvSpPr>
         <p:spPr>
           <a:xfrm>
-            <a:off x="457201" y="204787"/>
-            <a:ext cx="3008313" cy="871538"/>
+            <a:off x="609601" y="550000"/>
+            <a:ext cx="4011084" cy="871538"/>
           </a:xfrm>
         </p:spPr>
         <p:txBody>
@@ -2141,8 +2141,8 @@
         </p:nvSpPr>
         <p:spPr>
           <a:xfrm>
-            <a:off x="3575050" y="204788"/>
-            <a:ext cx="5111750" cy="4389835"/>
+            <a:off x="4766733" y="550000"/>
+            <a:ext cx="6815666" cy="4389835"/>
           </a:xfrm>
         </p:spPr>
         <p:txBody>
@@ -2225,8 +2225,8 @@
         </p:nvSpPr>
         <p:spPr>
           <a:xfrm>
-            <a:off x="457201" y="1076326"/>
-            <a:ext cx="3008313" cy="3518297"/>
+            <a:off x="609601" y="1076326"/>
+            <a:ext cx="4011084" cy="3518297"/>
           </a:xfrm>
         </p:spPr>
         <p:txBody>
@@ -2385,8 +2385,8 @@
         </p:nvSpPr>
         <p:spPr>
           <a:xfrm>
-            <a:off x="1792288" y="3600450"/>
-            <a:ext cx="5486400" cy="425054"/>
+            <a:off x="2389717" y="3600450"/>
+            <a:ext cx="7315200" cy="425054"/>
           </a:xfrm>
         </p:spPr>
         <p:txBody>
@@ -2416,8 +2416,8 @@
         </p:nvSpPr>
         <p:spPr>
           <a:xfrm>
-            <a:off x="1792288" y="459581"/>
-            <a:ext cx="5486400" cy="3086100"/>
+            <a:off x="2389717" y="550000"/>
+            <a:ext cx="7315200" cy="3086100"/>
           </a:xfrm>
         </p:spPr>
         <p:txBody>
@@ -2477,8 +2477,8 @@
         </p:nvSpPr>
         <p:spPr>
           <a:xfrm>
-            <a:off x="1792288" y="4025503"/>
-            <a:ext cx="5486400" cy="603647"/>
+            <a:off x="2389717" y="4025503"/>
+            <a:ext cx="7315200" cy="603647"/>
           </a:xfrm>
         </p:spPr>
         <p:txBody>
@@ -2612,9 +2612,12 @@
 <p:sldMaster xmlns:a="http://schemas.openxmlformats.org/drawingml/2006/main" xmlns:p="http://schemas.openxmlformats.org/presentationml/2006/main" xmlns:r="http://schemas.openxmlformats.org/officeDocument/2006/relationships">
   <p:cSld>
     <p:bg>
-      <p:bgRef idx="1001">
-        <a:schemeClr val="bg1"/>
-      </p:bgRef>
+      <p:bgPr>
+        <a:solidFill>
+          <a:srgbClr val="F8FAFC"/>
+        </a:solidFill>
+        <a:effectLst/>
+      </p:bgPr>
     </p:bg>
     <p:spTree>
       <p:nvGrpSpPr>
@@ -2842,6 +2845,30 @@
           </a:p>
         </p:txBody>
       </p:sp>
+      <p:pic>
+        <p:nvPicPr>
+          <p:cNvPr id="99" name="Logo"/>
+          <p:cNvPicPr>
+            <a:picLocks noChangeAspect="1"/>
+          </p:cNvPicPr>
+          <p:nvPr userDrawn="1"/>
+        </p:nvPicPr>
+        <p:blipFill>
+          <a:blip r:embed="rIdLogo"/>
+          <a:stretch>
+            <a:fillRect/>
+          </a:stretch>
+        </p:blipFill>
+        <p:spPr>
+          <a:xfrm>
+            <a:off x="365760" y="182880"/>
+            <a:ext cx="1097280" cy="320040"/>
+          </a:xfrm>
+          <a:prstGeom prst="rect">
+            <a:avLst/>
+          </a:prstGeom>
+        </p:spPr>
+      </p:pic>
     </p:spTree>
     <p:extLst>
       <p:ext uri="{BB962C8B-B14F-4D97-AF65-F5344CB8AC3E}">
@@ -3145,8 +3172,8 @@
         </p:nvSpPr>
         <p:spPr>
           <a:xfrm>
-            <a:off x="685800" y="1597819"/>
-            <a:ext cx="7772400" cy="1102519"/>
+            <a:off x="914400" y="1597819"/>
+            <a:ext cx="10363200" cy="1102519"/>
           </a:xfrm>
         </p:spPr>
         <p:txBody>
@@ -3175,8 +3202,8 @@
         </p:nvSpPr>
         <p:spPr>
           <a:xfrm>
-            <a:off x="1371600" y="2914650"/>
-            <a:ext cx="6400800" cy="1314450"/>
+            <a:off x="1828800" y="2914650"/>
+            <a:ext cx="8534400" cy="1314450"/>
           </a:xfrm>
         </p:spPr>
         <p:txBody>
@@ -7862,8 +7889,8 @@
           </p:nvPr>
         </p:nvGraphicFramePr>
         <p:xfrm>
-          <a:off x="457200" y="1625600"/>
-          <a:ext cx="4038600" cy="2959100"/>
+          <a:off x="609600" y="1625600"/>
+          <a:ext cx="5384800" cy="2959100"/>
         </p:xfrm>
         <a:graphic>
           <a:graphicData uri="http://schemas.openxmlformats.org/drawingml/2006/table">
@@ -7872,10 +7899,10 @@
                 <a:tableStyleId>{5C22544A-7EE6-4342-B048-85BDC9FD1C3A}</a:tableStyleId>
               </a:tblPr>
               <a:tblGrid>
-                <a:gridCol w="1003300"/>
-                <a:gridCol w="1003300"/>
-                <a:gridCol w="1003300"/>
-                <a:gridCol w="1003300"/>
+                <a:gridCol w="1346200"/>
+                <a:gridCol w="1346200"/>
+                <a:gridCol w="1346200"/>
+                <a:gridCol w="1346200"/>
               </a:tblGrid>
               <a:tr h="0">
                 <a:tc>
@@ -8140,8 +8167,8 @@
           </p:nvPr>
         </p:nvGraphicFramePr>
         <p:xfrm>
-          <a:off x="4635500" y="1625600"/>
-          <a:ext cx="4038600" cy="2959100"/>
+          <a:off x="6184900" y="1625600"/>
+          <a:ext cx="5384800" cy="2959100"/>
         </p:xfrm>
         <a:graphic>
           <a:graphicData uri="http://schemas.openxmlformats.org/drawingml/2006/table">
@@ -8150,9 +8177,9 @@
                 <a:tableStyleId>{5C22544A-7EE6-4342-B048-85BDC9FD1C3A}</a:tableStyleId>
               </a:tblPr>
               <a:tblGrid>
-                <a:gridCol w="1346200"/>
-                <a:gridCol w="1346200"/>
-                <a:gridCol w="1346200"/>
+                <a:gridCol w="1790700"/>
+                <a:gridCol w="1790700"/>
+                <a:gridCol w="1790700"/>
               </a:tblGrid>
               <a:tr h="0">
                 <a:tc>
@@ -13362,25 +13389,25 @@
   <a:themeElements>
     <a:clrScheme name="Office">
       <a:dk1>
-        <a:sysClr val="windowText" lastClr="000000"/>
+        <a:srgbClr val="0F172A"/>
       </a:dk1>
       <a:lt1>
-        <a:sysClr val="window" lastClr="FFFFFF"/>
+        <a:srgbClr val="F8FAFC"/>
       </a:lt1>
       <a:dk2>
-        <a:srgbClr val="1F497D"/>
+        <a:srgbClr val="004367"/>
       </a:dk2>
       <a:lt2>
-        <a:srgbClr val="EEECE1"/>
+        <a:srgbClr val="FFFFFF"/>
       </a:lt2>
       <a:accent1>
-        <a:srgbClr val="4F81BD"/>
+        <a:srgbClr val="004367"/>
       </a:accent1>
       <a:accent2>
-        <a:srgbClr val="C0504D"/>
+        <a:srgbClr val="56A09A"/>
       </a:accent2>
       <a:accent3>
-        <a:srgbClr val="9BBB59"/>
+        <a:srgbClr val="31BAE9"/>
       </a:accent3>
       <a:accent4>
         <a:srgbClr val="8064A2"/>
@@ -13392,7 +13419,7 @@
         <a:srgbClr val="F79646"/>
       </a:accent6>
       <a:hlink>
-        <a:srgbClr val="0000FF"/>
+        <a:srgbClr val="56A09A"/>
       </a:hlink>
       <a:folHlink>
         <a:srgbClr val="800080"/>
@@ -13400,7 +13427,7 @@
     </a:clrScheme>
     <a:fontScheme name="Office">
       <a:majorFont>
-        <a:latin typeface="Calibri"/>
+        <a:latin typeface="Inter"/>
         <a:ea typeface=""/>
         <a:cs typeface=""/>
         <a:font script="Jpan" typeface="ＭＳ Ｐゴシック"/>
@@ -13435,7 +13462,7 @@
         <a:font script="Geor" typeface="Sylfaen"/>
       </a:majorFont>
       <a:minorFont>
-        <a:latin typeface="Calibri"/>
+        <a:latin typeface="Inter"/>
         <a:ea typeface=""/>
         <a:cs typeface=""/>
         <a:font script="Jpan" typeface="ＭＳ Ｐゴシック"/>
